--- a/docs/pptx/Ch14_SUPPLEMENT.pptx
+++ b/docs/pptx/Ch14_SUPPLEMENT.pptx
@@ -503,10 +503,23 @@
           <a:lstStyle/>
           <a:p>
             <a:r>
-              <a:rPr lang="en-US" dirty="0"/>
-              <a:t/>
-            </a:r>
-            <a:endParaRPr lang="en-US" dirty="0"/>
+              <a:t>PROF: Exercice D4 — rédiger 3 bénéfices de l'implementation independence.</a:t>
+            </a:r>
+          </a:p>
+          <a:p>
+            <a:r>
+              <a:t>Chaque bénéfice doit avoir :</a:t>
+            </a:r>
+          </a:p>
+          <a:p>
+            <a:r>
+              <a:t>1) Nom du bénéfice 2) Explication 3) Exemple Java avec code.</a:t>
+            </a:r>
+          </a:p>
+          <a:p>
+            <a:r>
+              <a:t>Durée : 30 min.</a:t>
+            </a:r>
           </a:p>
         </p:txBody>
       </p:sp>
@@ -591,10 +604,18 @@
           <a:lstStyle/>
           <a:p>
             <a:r>
-              <a:rPr lang="en-US" dirty="0"/>
-              <a:t/>
-            </a:r>
-            <a:endParaRPr lang="en-US" dirty="0"/>
+              <a:t>PROF: Questions trade-off :</a:t>
+            </a:r>
+          </a:p>
+          <a:p>
+            <a:r>
+              <a:t>'Si vous avez 1GB de RAM et 1 million de données, vous choisissez HashMap ou TreeMap ?'</a:t>
+            </a:r>
+          </a:p>
+          <a:p>
+            <a:r>
+              <a:t>→ Dépend : si besoin d'ordre → TreeMap. Sinon HashMap mais attention à la mémoire.</a:t>
+            </a:r>
           </a:p>
         </p:txBody>
       </p:sp>
@@ -679,10 +700,13 @@
           <a:lstStyle/>
           <a:p>
             <a:r>
-              <a:rPr lang="en-US" dirty="0"/>
-              <a:t/>
-            </a:r>
-            <a:endParaRPr lang="en-US" dirty="0"/>
+              <a:t>PROF: Récap — trade-off = PAS de solution parfaite. Le bon choix dépend des CONTRAINTES.</a:t>
+            </a:r>
+          </a:p>
+          <a:p>
+            <a:r>
+              <a:t>Liste des contraintes possibles : mémoire, temps, ordre, concurrence, maintenabilité.</a:t>
+            </a:r>
           </a:p>
         </p:txBody>
       </p:sp>
